--- a/docs/03-Slides/ETHAGT10/ETHAGT10-slides.pptx
+++ b/docs/03-Slides/ETHAGT10/ETHAGT10-slides.pptx
@@ -10587,6 +10587,42 @@
         </p:nvSpPr>
         <p:spPr>
           <a:xfrm>
+            <a:off x="274320" y="6035040"/>
+            <a:ext cx="11612880" cy="320040"/>
+          </a:xfrm>
+          <a:prstGeom prst="rect">
+            <a:avLst/>
+          </a:prstGeom>
+          <a:noFill/>
+        </p:spPr>
+        <p:txBody>
+          <a:bodyPr wrap="square">
+            <a:spAutoFit/>
+          </a:bodyPr>
+          <a:lstStyle/>
+          <a:p>
+            <a:pPr algn="l">
+              <a:defRPr sz="900" b="0">
+                <a:solidFill>
+                  <a:srgbClr val="2980B9"/>
+                </a:solidFill>
+                <a:latin typeface="Segoe UI"/>
+              </a:defRPr>
+            </a:pPr>
+            <a:r>
+              <a:t>MCTS = Monte Carlo Tree Search — Busca em Arvore de Monte Carlo</a:t>
+            </a:r>
+          </a:p>
+        </p:txBody>
+      </p:sp>
+      <p:sp>
+        <p:nvSpPr>
+          <p:cNvPr id="8" name="TextBox 7"/>
+          <p:cNvSpPr txBox="1"/>
+          <p:nvPr/>
+        </p:nvSpPr>
+        <p:spPr>
+          <a:xfrm>
             <a:off x="274320" y="6400800"/>
             <a:ext cx="6400800" cy="365760"/>
           </a:xfrm>
@@ -10614,7 +10650,7 @@
       </p:sp>
       <p:sp>
         <p:nvSpPr>
-          <p:cNvPr id="8" name="TextBox 7"/>
+          <p:cNvPr id="9" name="TextBox 8"/>
           <p:cNvSpPr txBox="1"/>
           <p:nvPr/>
         </p:nvSpPr>
@@ -25252,6 +25288,42 @@
         </p:nvSpPr>
         <p:spPr>
           <a:xfrm>
+            <a:off x="274320" y="6035040"/>
+            <a:ext cx="11612880" cy="320040"/>
+          </a:xfrm>
+          <a:prstGeom prst="rect">
+            <a:avLst/>
+          </a:prstGeom>
+          <a:noFill/>
+        </p:spPr>
+        <p:txBody>
+          <a:bodyPr wrap="square">
+            <a:spAutoFit/>
+          </a:bodyPr>
+          <a:lstStyle/>
+          <a:p>
+            <a:pPr algn="l">
+              <a:defRPr sz="900" b="0">
+                <a:solidFill>
+                  <a:srgbClr val="2980B9"/>
+                </a:solidFill>
+                <a:latin typeface="Segoe UI"/>
+              </a:defRPr>
+            </a:pPr>
+            <a:r>
+              <a:t>LLM = Large Language Model — Modelo de Linguagem de Grande Escala  ·  PR = Pull Request — requisicao de pull (GitHub)</a:t>
+            </a:r>
+          </a:p>
+        </p:txBody>
+      </p:sp>
+      <p:sp>
+        <p:nvSpPr>
+          <p:cNvPr id="8" name="TextBox 7"/>
+          <p:cNvSpPr txBox="1"/>
+          <p:nvPr/>
+        </p:nvSpPr>
+        <p:spPr>
+          <a:xfrm>
             <a:off x="274320" y="6400800"/>
             <a:ext cx="6400800" cy="365760"/>
           </a:xfrm>
@@ -25279,7 +25351,7 @@
       </p:sp>
       <p:sp>
         <p:nvSpPr>
-          <p:cNvPr id="8" name="TextBox 7"/>
+          <p:cNvPr id="9" name="TextBox 8"/>
           <p:cNvSpPr txBox="1"/>
           <p:nvPr/>
         </p:nvSpPr>
@@ -29770,6 +29842,42 @@
         </p:nvSpPr>
         <p:spPr>
           <a:xfrm>
+            <a:off x="274320" y="6035040"/>
+            <a:ext cx="11612880" cy="320040"/>
+          </a:xfrm>
+          <a:prstGeom prst="rect">
+            <a:avLst/>
+          </a:prstGeom>
+          <a:noFill/>
+        </p:spPr>
+        <p:txBody>
+          <a:bodyPr wrap="square">
+            <a:spAutoFit/>
+          </a:bodyPr>
+          <a:lstStyle/>
+          <a:p>
+            <a:pPr algn="l">
+              <a:defRPr sz="900" b="0">
+                <a:solidFill>
+                  <a:srgbClr val="2980B9"/>
+                </a:solidFill>
+                <a:latin typeface="Segoe UI"/>
+              </a:defRPr>
+            </a:pPr>
+            <a:r>
+              <a:t>ReAct = Reasoning and Acting — padrao de loop Thought / Action / Observation</a:t>
+            </a:r>
+          </a:p>
+        </p:txBody>
+      </p:sp>
+      <p:sp>
+        <p:nvSpPr>
+          <p:cNvPr id="8" name="TextBox 7"/>
+          <p:cNvSpPr txBox="1"/>
+          <p:nvPr/>
+        </p:nvSpPr>
+        <p:spPr>
+          <a:xfrm>
             <a:off x="274320" y="6400800"/>
             <a:ext cx="6400800" cy="365760"/>
           </a:xfrm>
@@ -29797,7 +29905,7 @@
       </p:sp>
       <p:sp>
         <p:nvSpPr>
-          <p:cNvPr id="8" name="TextBox 7"/>
+          <p:cNvPr id="9" name="TextBox 8"/>
           <p:cNvSpPr txBox="1"/>
           <p:nvPr/>
         </p:nvSpPr>
